--- a/classes/parte-13-seguridad-movil-iot-e-inalambrica/274-seguridad-automotriz-y-bus-can/clase-274-presentacion.pptx
+++ b/classes/parte-13-seguridad-movil-iot-e-inalambrica/274-seguridad-automotriz-y-bus-can/clase-274-presentacion.pptx
@@ -17,6 +17,10 @@
     <p:sldId id="265" r:id="rId16"/>
     <p:sldId id="266" r:id="rId17"/>
     <p:sldId id="267" r:id="rId18"/>
+    <p:sldId id="268" r:id="rId19"/>
+    <p:sldId id="269" r:id="rId20"/>
+    <p:sldId id="270" r:id="rId21"/>
+    <p:sldId id="271" r:id="rId22"/>
   </p:sldIdLst>
   <p:sldSz cx="9144000" cy="6858000" type="screen4x3"/>
   <p:notesSz cx="6858000" cy="9144000"/>
@@ -3198,7 +3202,7 @@
                   <a:srgbClr val="0B3D2E"/>
                 </a:solidFill>
               </a:rPr>
-              <a:t>⚠️ Errores comunes</a:t>
+              <a:t>🧪 Laboratorio guiado</a:t>
             </a:r>
           </a:p>
         </p:txBody>
@@ -3236,67 +3240,97 @@
                   <a:srgbClr val="22282E"/>
                 </a:solidFill>
               </a:rPr>
-              <a:t>•  vcan0 no aparece — Falta modprobe vcan; cárgalo y crea la interfaz</a:t>
-            </a:r>
-          </a:p>
-          <a:p>
-            <a:pPr>
-              <a:spcAft>
-                <a:spcPts val="600"/>
-              </a:spcAft>
-            </a:pPr>
-            <a:r>
-              <a:rPr sz="1500">
-                <a:solidFill>
-                  <a:srgbClr val="22282E"/>
-                </a:solidFill>
-              </a:rPr>
-              <a:t>•  candump no muestra nada — Interfaz caída o simulador parado; ip link set up y arranca ICSim</a:t>
-            </a:r>
-          </a:p>
-          <a:p>
-            <a:pPr>
-              <a:spcAft>
-                <a:spcPts val="600"/>
-              </a:spcAft>
-            </a:pPr>
-            <a:r>
-              <a:rPr sz="1500">
-                <a:solidFill>
-                  <a:srgbClr val="22282E"/>
-                </a:solidFill>
-              </a:rPr>
-              <a:t>•  Replay no reproduce la función — ID/byte equivocado o el simulador reescribe el valor; reidentifica con cansniffer</a:t>
-            </a:r>
-          </a:p>
-          <a:p>
-            <a:pPr>
-              <a:spcAft>
-                <a:spcPts val="600"/>
-              </a:spcAft>
-            </a:pPr>
-            <a:r>
-              <a:rPr sz="1500">
-                <a:solidFill>
-                  <a:srgbClr val="22282E"/>
-                </a:solidFill>
-              </a:rPr>
-              <a:t>•  Demasiado tráfico para analizar — Usa cansniffer y filtros por ID en lugar de candump crudo</a:t>
-            </a:r>
-          </a:p>
-          <a:p>
-            <a:pPr>
-              <a:spcAft>
-                <a:spcPts val="600"/>
-              </a:spcAft>
-            </a:pPr>
-            <a:r>
-              <a:rPr sz="1500">
-                <a:solidFill>
-                  <a:srgbClr val="22282E"/>
-                </a:solidFill>
-              </a:rPr>
-              <a:t>•  Bitrate incorrecto (hardware real) — Configura el bitrate del bus (500k típico) al levantar la interfaz</a:t>
+              <a:t>•  Monta ICSim sobre vcan0 para trabajar sin riesgo físico.</a:t>
+            </a:r>
+          </a:p>
+          <a:p>
+            <a:pPr>
+              <a:spcAft>
+                <a:spcPts val="600"/>
+              </a:spcAft>
+            </a:pPr>
+            <a:r>
+              <a:rPr sz="1500">
+                <a:solidFill>
+                  <a:srgbClr val="22282E"/>
+                </a:solidFill>
+              </a:rPr>
+              <a:t>•  Observa el tráfico base: con candump y cansniffer identifica el flujo de IDs mientras el mando genera actividad.</a:t>
+            </a:r>
+          </a:p>
+          <a:p>
+            <a:pPr>
+              <a:spcAft>
+                <a:spcPts val="600"/>
+              </a:spcAft>
+            </a:pPr>
+            <a:r>
+              <a:rPr sz="1500">
+                <a:solidFill>
+                  <a:srgbClr val="22282E"/>
+                </a:solidFill>
+              </a:rPr>
+              <a:t>•  Aísla una función: acciona un control (p. ej. intermitente/velocímetro) y usa cansniffer para ver qué ID/bytes cambian.</a:t>
+            </a:r>
+          </a:p>
+          <a:p>
+            <a:pPr>
+              <a:spcAft>
+                <a:spcPts val="600"/>
+              </a:spcAft>
+            </a:pPr>
+            <a:r>
+              <a:rPr sz="1500">
+                <a:solidFill>
+                  <a:srgbClr val="22282E"/>
+                </a:solidFill>
+              </a:rPr>
+              <a:t>•  Ingeniería inversa: correlaciona la acción con la trama exacta; anota ID, offset de byte y rango de valores.</a:t>
+            </a:r>
+          </a:p>
+          <a:p>
+            <a:pPr>
+              <a:spcAft>
+                <a:spcPts val="600"/>
+              </a:spcAft>
+            </a:pPr>
+            <a:r>
+              <a:rPr sz="1500">
+                <a:solidFill>
+                  <a:srgbClr val="22282E"/>
+                </a:solidFill>
+              </a:rPr>
+              <a:t>•  Reproduce: con cansend reproduce la trama para reproducir la función en el simulador (replay).</a:t>
+            </a:r>
+          </a:p>
+          <a:p>
+            <a:pPr>
+              <a:spcAft>
+                <a:spcPts val="600"/>
+              </a:spcAft>
+            </a:pPr>
+            <a:r>
+              <a:rPr sz="1500">
+                <a:solidFill>
+                  <a:srgbClr val="22282E"/>
+                </a:solidFill>
+              </a:rPr>
+              <a:t>•  Explora diagnóstico: revisa conceptualmente UDS (seed/key) y por qué un acceso de seguridad débil permite rutinas peligrosas.</a:t>
+            </a:r>
+          </a:p>
+          <a:p>
+            <a:pPr>
+              <a:spcAft>
+                <a:spcPts val="600"/>
+              </a:spcAft>
+            </a:pPr>
+            <a:r>
+              <a:rPr sz="1500">
+                <a:solidFill>
+                  <a:srgbClr val="22282E"/>
+                </a:solidFill>
+              </a:rPr>
+              <a:t>•  Superficies remotas: documenta cómo telemática, infoentretenimiento y TPMS amplían la superficie y cómo un gateway seguro segmenta buses.</a:t>
             </a:r>
           </a:p>
         </p:txBody>
@@ -3347,7 +3381,7 @@
                   <a:srgbClr val="0B3D2E"/>
                 </a:solidFill>
               </a:rPr>
-              <a:t>❓ Preguntas frecuentes</a:t>
+              <a:t>✍️ Ejercicios</a:t>
             </a:r>
           </a:p>
         </p:txBody>
@@ -3385,82 +3419,82 @@
                   <a:srgbClr val="22282E"/>
                 </a:solidFill>
               </a:rPr>
-              <a:t>•  ❓ ¿Puedo practicar sin un coche?</a:t>
-            </a:r>
-          </a:p>
-          <a:p>
-            <a:pPr>
-              <a:spcAft>
-                <a:spcPts val="600"/>
-              </a:spcAft>
-            </a:pPr>
-            <a:r>
-              <a:rPr sz="1500">
-                <a:solidFill>
-                  <a:srgbClr val="22282E"/>
-                </a:solidFill>
-              </a:rPr>
-              <a:t>•  Sí y es lo recomendable para empezar: ICSim sobre CAN virtual reproduce un tablero y su tráfico sin ningún riesgo físico.</a:t>
-            </a:r>
-          </a:p>
-          <a:p>
-            <a:pPr>
-              <a:spcAft>
-                <a:spcPts val="600"/>
-              </a:spcAft>
-            </a:pPr>
-            <a:r>
-              <a:rPr sz="1500">
-                <a:solidFill>
-                  <a:srgbClr val="22282E"/>
-                </a:solidFill>
-              </a:rPr>
-              <a:t>•  ❓ ¿Por qué el bus CAN es tan inseguro?</a:t>
-            </a:r>
-          </a:p>
-          <a:p>
-            <a:pPr>
-              <a:spcAft>
-                <a:spcPts val="600"/>
-              </a:spcAft>
-            </a:pPr>
-            <a:r>
-              <a:rPr sz="1500">
-                <a:solidFill>
-                  <a:srgbClr val="22282E"/>
-                </a:solidFill>
-              </a:rPr>
-              <a:t>•  Es un bus de difusión sin autenticación de origen ni cifrado: cualquier ECU (o atacante con acceso) puede leer todo e inyectar tramas que las demás aceptan como legítimas.</a:t>
-            </a:r>
-          </a:p>
-          <a:p>
-            <a:pPr>
-              <a:spcAft>
-                <a:spcPts val="600"/>
-              </a:spcAft>
-            </a:pPr>
-            <a:r>
-              <a:rPr sz="1500">
-                <a:solidFill>
-                  <a:srgbClr val="22282E"/>
-                </a:solidFill>
-              </a:rPr>
-              <a:t>•  ❓ ¿Cómo llega un atacante remoto al CAN?</a:t>
-            </a:r>
-          </a:p>
-          <a:p>
-            <a:pPr>
-              <a:spcAft>
-                <a:spcPts val="600"/>
-              </a:spcAft>
-            </a:pPr>
-            <a:r>
-              <a:rPr sz="1500">
-                <a:solidFill>
-                  <a:srgbClr val="22282E"/>
-                </a:solidFill>
-              </a:rPr>
-              <a:t>•  A través de superficies conectadas (telemática celular, WiFi/Bluetooth del infoentretenimiento, TPMS) que, si no están bien segmentadas por un gateway, permiten pivotar hacia buses críticos.</a:t>
+              <a:t>•  Configura vcan0 y arranca ICSim.</a:t>
+            </a:r>
+          </a:p>
+          <a:p>
+            <a:pPr>
+              <a:spcAft>
+                <a:spcPts val="600"/>
+              </a:spcAft>
+            </a:pPr>
+            <a:r>
+              <a:rPr sz="1500">
+                <a:solidFill>
+                  <a:srgbClr val="22282E"/>
+                </a:solidFill>
+              </a:rPr>
+              <a:t>•  Identifica el ID y byte que controla el velocímetro simulado.</a:t>
+            </a:r>
+          </a:p>
+          <a:p>
+            <a:pPr>
+              <a:spcAft>
+                <a:spcPts val="600"/>
+              </a:spcAft>
+            </a:pPr>
+            <a:r>
+              <a:rPr sz="1500">
+                <a:solidFill>
+                  <a:srgbClr val="22282E"/>
+                </a:solidFill>
+              </a:rPr>
+              <a:t>•  Reproduce por replay el encendido de una señal (intermitente).</a:t>
+            </a:r>
+          </a:p>
+          <a:p>
+            <a:pPr>
+              <a:spcAft>
+                <a:spcPts val="600"/>
+              </a:spcAft>
+            </a:pPr>
+            <a:r>
+              <a:rPr sz="1500">
+                <a:solidFill>
+                  <a:srgbClr val="22282E"/>
+                </a:solidFill>
+              </a:rPr>
+              <a:t>•  Explica por qué CAN no puede saber qué ECU envió una trama.</a:t>
+            </a:r>
+          </a:p>
+          <a:p>
+            <a:pPr>
+              <a:spcAft>
+                <a:spcPts val="600"/>
+              </a:spcAft>
+            </a:pPr>
+            <a:r>
+              <a:rPr sz="1500">
+                <a:solidFill>
+                  <a:srgbClr val="22282E"/>
+                </a:solidFill>
+              </a:rPr>
+              <a:t>•  Describe el flujo seed/key de UDS y su debilidad típica.</a:t>
+            </a:r>
+          </a:p>
+          <a:p>
+            <a:pPr>
+              <a:spcAft>
+                <a:spcPts val="600"/>
+              </a:spcAft>
+            </a:pPr>
+            <a:r>
+              <a:rPr sz="1500">
+                <a:solidFill>
+                  <a:srgbClr val="22282E"/>
+                </a:solidFill>
+              </a:rPr>
+              <a:t>•  Enumera tres superficies de ataque remotas de un vehículo y su mitigación.</a:t>
             </a:r>
           </a:p>
         </p:txBody>
@@ -3511,7 +3545,7 @@
                   <a:srgbClr val="0B3D2E"/>
                 </a:solidFill>
               </a:rPr>
-              <a:t>🔗 Referencias</a:t>
+              <a:t>📝 Reto verificable</a:t>
             </a:r>
           </a:p>
         </p:txBody>
@@ -3549,6 +3583,408 @@
                   <a:srgbClr val="22282E"/>
                 </a:solidFill>
               </a:rPr>
+              <a:t>•  En el simulador ICSim, haz ingeniería inversa de una función (velocímetro, intermitentes o cerraduras) y reprodúcela mediante inyección de la trama correcta. Criterio de aceptación: identificas el…</a:t>
+            </a:r>
+          </a:p>
+        </p:txBody>
+      </p:sp>
+    </p:spTree>
+  </p:cSld>
+  <p:clrMapOvr>
+    <a:masterClrMapping/>
+  </p:clrMapOvr>
+</p:sld>
+</file>
+
+<file path=ppt/slides/slide13.xml><?xml version="1.0" encoding="utf-8"?>
+<p:sld xmlns:a="http://schemas.openxmlformats.org/drawingml/2006/main" xmlns:p="http://schemas.openxmlformats.org/presentationml/2006/main" xmlns:r="http://schemas.openxmlformats.org/officeDocument/2006/relationships">
+  <p:cSld>
+    <p:spTree>
+      <p:nvGrpSpPr>
+        <p:cNvPr id="1" name=""/>
+        <p:cNvGrpSpPr/>
+        <p:nvPr/>
+      </p:nvGrpSpPr>
+      <p:grpSpPr/>
+      <p:sp>
+        <p:nvSpPr>
+          <p:cNvPr id="2" name="TextBox 1"/>
+          <p:cNvSpPr txBox="1"/>
+          <p:nvPr/>
+        </p:nvSpPr>
+        <p:spPr>
+          <a:xfrm>
+            <a:off x="457200" y="320040"/>
+            <a:ext cx="8229600" cy="822960"/>
+          </a:xfrm>
+          <a:prstGeom prst="rect">
+            <a:avLst/>
+          </a:prstGeom>
+          <a:noFill/>
+        </p:spPr>
+        <p:txBody>
+          <a:bodyPr wrap="square">
+            <a:spAutoFit/>
+          </a:bodyPr>
+          <a:lstStyle/>
+          <a:p>
+            <a:r>
+              <a:rPr sz="2600" b="1">
+                <a:solidFill>
+                  <a:srgbClr val="0B3D2E"/>
+                </a:solidFill>
+              </a:rPr>
+              <a:t>⚠️ Errores comunes</a:t>
+            </a:r>
+          </a:p>
+        </p:txBody>
+      </p:sp>
+      <p:sp>
+        <p:nvSpPr>
+          <p:cNvPr id="3" name="TextBox 2"/>
+          <p:cNvSpPr txBox="1"/>
+          <p:nvPr/>
+        </p:nvSpPr>
+        <p:spPr>
+          <a:xfrm>
+            <a:off x="457200" y="1280160"/>
+            <a:ext cx="8229600" cy="4937760"/>
+          </a:xfrm>
+          <a:prstGeom prst="rect">
+            <a:avLst/>
+          </a:prstGeom>
+          <a:noFill/>
+        </p:spPr>
+        <p:txBody>
+          <a:bodyPr wrap="square">
+            <a:spAutoFit/>
+          </a:bodyPr>
+          <a:lstStyle/>
+          <a:p>
+            <a:pPr>
+              <a:spcAft>
+                <a:spcPts val="600"/>
+              </a:spcAft>
+            </a:pPr>
+            <a:r>
+              <a:rPr sz="1500">
+                <a:solidFill>
+                  <a:srgbClr val="22282E"/>
+                </a:solidFill>
+              </a:rPr>
+              <a:t>•  vcan0 no aparece — Falta modprobe vcan; cárgalo y crea la interfaz</a:t>
+            </a:r>
+          </a:p>
+          <a:p>
+            <a:pPr>
+              <a:spcAft>
+                <a:spcPts val="600"/>
+              </a:spcAft>
+            </a:pPr>
+            <a:r>
+              <a:rPr sz="1500">
+                <a:solidFill>
+                  <a:srgbClr val="22282E"/>
+                </a:solidFill>
+              </a:rPr>
+              <a:t>•  candump no muestra nada — Interfaz caída o simulador parado; ip link set up y arranca ICSim</a:t>
+            </a:r>
+          </a:p>
+          <a:p>
+            <a:pPr>
+              <a:spcAft>
+                <a:spcPts val="600"/>
+              </a:spcAft>
+            </a:pPr>
+            <a:r>
+              <a:rPr sz="1500">
+                <a:solidFill>
+                  <a:srgbClr val="22282E"/>
+                </a:solidFill>
+              </a:rPr>
+              <a:t>•  Replay no reproduce la función — ID/byte equivocado o el simulador reescribe el valor; reidentifica con cansniffer</a:t>
+            </a:r>
+          </a:p>
+          <a:p>
+            <a:pPr>
+              <a:spcAft>
+                <a:spcPts val="600"/>
+              </a:spcAft>
+            </a:pPr>
+            <a:r>
+              <a:rPr sz="1500">
+                <a:solidFill>
+                  <a:srgbClr val="22282E"/>
+                </a:solidFill>
+              </a:rPr>
+              <a:t>•  Demasiado tráfico para analizar — Usa cansniffer y filtros por ID en lugar de candump crudo</a:t>
+            </a:r>
+          </a:p>
+          <a:p>
+            <a:pPr>
+              <a:spcAft>
+                <a:spcPts val="600"/>
+              </a:spcAft>
+            </a:pPr>
+            <a:r>
+              <a:rPr sz="1500">
+                <a:solidFill>
+                  <a:srgbClr val="22282E"/>
+                </a:solidFill>
+              </a:rPr>
+              <a:t>•  Bitrate incorrecto (hardware real) — Configura el bitrate del bus (500k típico) al levantar la interfaz</a:t>
+            </a:r>
+          </a:p>
+        </p:txBody>
+      </p:sp>
+    </p:spTree>
+  </p:cSld>
+  <p:clrMapOvr>
+    <a:masterClrMapping/>
+  </p:clrMapOvr>
+</p:sld>
+</file>
+
+<file path=ppt/slides/slide14.xml><?xml version="1.0" encoding="utf-8"?>
+<p:sld xmlns:a="http://schemas.openxmlformats.org/drawingml/2006/main" xmlns:p="http://schemas.openxmlformats.org/presentationml/2006/main" xmlns:r="http://schemas.openxmlformats.org/officeDocument/2006/relationships">
+  <p:cSld>
+    <p:spTree>
+      <p:nvGrpSpPr>
+        <p:cNvPr id="1" name=""/>
+        <p:cNvGrpSpPr/>
+        <p:nvPr/>
+      </p:nvGrpSpPr>
+      <p:grpSpPr/>
+      <p:sp>
+        <p:nvSpPr>
+          <p:cNvPr id="2" name="TextBox 1"/>
+          <p:cNvSpPr txBox="1"/>
+          <p:nvPr/>
+        </p:nvSpPr>
+        <p:spPr>
+          <a:xfrm>
+            <a:off x="457200" y="320040"/>
+            <a:ext cx="8229600" cy="822960"/>
+          </a:xfrm>
+          <a:prstGeom prst="rect">
+            <a:avLst/>
+          </a:prstGeom>
+          <a:noFill/>
+        </p:spPr>
+        <p:txBody>
+          <a:bodyPr wrap="square">
+            <a:spAutoFit/>
+          </a:bodyPr>
+          <a:lstStyle/>
+          <a:p>
+            <a:r>
+              <a:rPr sz="2600" b="1">
+                <a:solidFill>
+                  <a:srgbClr val="0B3D2E"/>
+                </a:solidFill>
+              </a:rPr>
+              <a:t>❓ Preguntas frecuentes</a:t>
+            </a:r>
+          </a:p>
+        </p:txBody>
+      </p:sp>
+      <p:sp>
+        <p:nvSpPr>
+          <p:cNvPr id="3" name="TextBox 2"/>
+          <p:cNvSpPr txBox="1"/>
+          <p:nvPr/>
+        </p:nvSpPr>
+        <p:spPr>
+          <a:xfrm>
+            <a:off x="457200" y="1280160"/>
+            <a:ext cx="8229600" cy="4937760"/>
+          </a:xfrm>
+          <a:prstGeom prst="rect">
+            <a:avLst/>
+          </a:prstGeom>
+          <a:noFill/>
+        </p:spPr>
+        <p:txBody>
+          <a:bodyPr wrap="square">
+            <a:spAutoFit/>
+          </a:bodyPr>
+          <a:lstStyle/>
+          <a:p>
+            <a:pPr>
+              <a:spcAft>
+                <a:spcPts val="600"/>
+              </a:spcAft>
+            </a:pPr>
+            <a:r>
+              <a:rPr sz="1500">
+                <a:solidFill>
+                  <a:srgbClr val="22282E"/>
+                </a:solidFill>
+              </a:rPr>
+              <a:t>•  ❓ ¿Puedo practicar sin un coche?</a:t>
+            </a:r>
+          </a:p>
+          <a:p>
+            <a:pPr>
+              <a:spcAft>
+                <a:spcPts val="600"/>
+              </a:spcAft>
+            </a:pPr>
+            <a:r>
+              <a:rPr sz="1500">
+                <a:solidFill>
+                  <a:srgbClr val="22282E"/>
+                </a:solidFill>
+              </a:rPr>
+              <a:t>•  Sí y es lo recomendable para empezar: ICSim sobre CAN virtual reproduce un tablero y su tráfico sin ningún riesgo físico.</a:t>
+            </a:r>
+          </a:p>
+          <a:p>
+            <a:pPr>
+              <a:spcAft>
+                <a:spcPts val="600"/>
+              </a:spcAft>
+            </a:pPr>
+            <a:r>
+              <a:rPr sz="1500">
+                <a:solidFill>
+                  <a:srgbClr val="22282E"/>
+                </a:solidFill>
+              </a:rPr>
+              <a:t>•  ❓ ¿Por qué el bus CAN es tan inseguro?</a:t>
+            </a:r>
+          </a:p>
+          <a:p>
+            <a:pPr>
+              <a:spcAft>
+                <a:spcPts val="600"/>
+              </a:spcAft>
+            </a:pPr>
+            <a:r>
+              <a:rPr sz="1500">
+                <a:solidFill>
+                  <a:srgbClr val="22282E"/>
+                </a:solidFill>
+              </a:rPr>
+              <a:t>•  CAN clásico es un bus compartido sin autenticación criptográfica de origen ni confidencialidad incorporadas. Un nodo con acceso al segmento puede observar y transmitir, pero gateways, topología…</a:t>
+            </a:r>
+          </a:p>
+          <a:p>
+            <a:pPr>
+              <a:spcAft>
+                <a:spcPts val="600"/>
+              </a:spcAft>
+            </a:pPr>
+            <a:r>
+              <a:rPr sz="1500">
+                <a:solidFill>
+                  <a:srgbClr val="22282E"/>
+                </a:solidFill>
+              </a:rPr>
+              <a:t>•  ❓ ¿Cómo llega un atacante remoto al CAN?</a:t>
+            </a:r>
+          </a:p>
+          <a:p>
+            <a:pPr>
+              <a:spcAft>
+                <a:spcPts val="600"/>
+              </a:spcAft>
+            </a:pPr>
+            <a:r>
+              <a:rPr sz="1500">
+                <a:solidFill>
+                  <a:srgbClr val="22282E"/>
+                </a:solidFill>
+              </a:rPr>
+              <a:t>•  A través de superficies conectadas (telemática celular, WiFi/Bluetooth del infoentretenimiento, TPMS) que, si no están bien segmentadas por un gateway, permiten pivotar hacia buses críticos.</a:t>
+            </a:r>
+          </a:p>
+        </p:txBody>
+      </p:sp>
+    </p:spTree>
+  </p:cSld>
+  <p:clrMapOvr>
+    <a:masterClrMapping/>
+  </p:clrMapOvr>
+</p:sld>
+</file>
+
+<file path=ppt/slides/slide15.xml><?xml version="1.0" encoding="utf-8"?>
+<p:sld xmlns:a="http://schemas.openxmlformats.org/drawingml/2006/main" xmlns:p="http://schemas.openxmlformats.org/presentationml/2006/main" xmlns:r="http://schemas.openxmlformats.org/officeDocument/2006/relationships">
+  <p:cSld>
+    <p:spTree>
+      <p:nvGrpSpPr>
+        <p:cNvPr id="1" name=""/>
+        <p:cNvGrpSpPr/>
+        <p:nvPr/>
+      </p:nvGrpSpPr>
+      <p:grpSpPr/>
+      <p:sp>
+        <p:nvSpPr>
+          <p:cNvPr id="2" name="TextBox 1"/>
+          <p:cNvSpPr txBox="1"/>
+          <p:nvPr/>
+        </p:nvSpPr>
+        <p:spPr>
+          <a:xfrm>
+            <a:off x="457200" y="320040"/>
+            <a:ext cx="8229600" cy="822960"/>
+          </a:xfrm>
+          <a:prstGeom prst="rect">
+            <a:avLst/>
+          </a:prstGeom>
+          <a:noFill/>
+        </p:spPr>
+        <p:txBody>
+          <a:bodyPr wrap="square">
+            <a:spAutoFit/>
+          </a:bodyPr>
+          <a:lstStyle/>
+          <a:p>
+            <a:r>
+              <a:rPr sz="2600" b="1">
+                <a:solidFill>
+                  <a:srgbClr val="0B3D2E"/>
+                </a:solidFill>
+              </a:rPr>
+              <a:t>🔗 Referencias</a:t>
+            </a:r>
+          </a:p>
+        </p:txBody>
+      </p:sp>
+      <p:sp>
+        <p:nvSpPr>
+          <p:cNvPr id="3" name="TextBox 2"/>
+          <p:cNvSpPr txBox="1"/>
+          <p:nvPr/>
+        </p:nvSpPr>
+        <p:spPr>
+          <a:xfrm>
+            <a:off x="457200" y="1280160"/>
+            <a:ext cx="8229600" cy="4937760"/>
+          </a:xfrm>
+          <a:prstGeom prst="rect">
+            <a:avLst/>
+          </a:prstGeom>
+          <a:noFill/>
+        </p:spPr>
+        <p:txBody>
+          <a:bodyPr wrap="square">
+            <a:spAutoFit/>
+          </a:bodyPr>
+          <a:lstStyle/>
+          <a:p>
+            <a:pPr>
+              <a:spcAft>
+                <a:spcPts val="600"/>
+              </a:spcAft>
+            </a:pPr>
+            <a:r>
+              <a:rPr sz="1500">
+                <a:solidFill>
+                  <a:srgbClr val="22282E"/>
+                </a:solidFill>
+              </a:rPr>
               <a:t>•  The Car Hacker's Handbook — Craig Smith (No Starch Press): &lt;https://nostarch.com/carhacking&gt;</a:t>
             </a:r>
           </a:p>
@@ -3599,6 +4035,81 @@
           </a:p>
         </p:txBody>
       </p:sp>
+    </p:spTree>
+  </p:cSld>
+  <p:clrMapOvr>
+    <a:masterClrMapping/>
+  </p:clrMapOvr>
+</p:sld>
+</file>
+
+<file path=ppt/slides/slide16.xml><?xml version="1.0" encoding="utf-8"?>
+<p:sld xmlns:a="http://schemas.openxmlformats.org/drawingml/2006/main" xmlns:p="http://schemas.openxmlformats.org/presentationml/2006/main" xmlns:r="http://schemas.openxmlformats.org/officeDocument/2006/relationships">
+  <p:cSld>
+    <p:spTree>
+      <p:nvGrpSpPr>
+        <p:cNvPr id="1" name=""/>
+        <p:cNvGrpSpPr/>
+        <p:nvPr/>
+      </p:nvGrpSpPr>
+      <p:grpSpPr/>
+      <p:sp>
+        <p:nvSpPr>
+          <p:cNvPr id="2" name="TextBox 1"/>
+          <p:cNvSpPr txBox="1"/>
+          <p:nvPr/>
+        </p:nvSpPr>
+        <p:spPr>
+          <a:xfrm>
+            <a:off x="457200" y="274320"/>
+            <a:ext cx="8229600" cy="640080"/>
+          </a:xfrm>
+          <a:prstGeom prst="rect">
+            <a:avLst/>
+          </a:prstGeom>
+          <a:noFill/>
+        </p:spPr>
+        <p:txBody>
+          <a:bodyPr wrap="square">
+            <a:spAutoFit/>
+          </a:bodyPr>
+          <a:lstStyle/>
+          <a:p>
+            <a:r>
+              <a:rPr sz="2200" b="1">
+                <a:solidFill>
+                  <a:srgbClr val="0B3D2E"/>
+                </a:solidFill>
+              </a:rPr>
+              <a:t>Diagrama de la clase</a:t>
+            </a:r>
+          </a:p>
+        </p:txBody>
+      </p:sp>
+      <p:pic>
+        <p:nvPicPr>
+          <p:cNvPr id="3" name="Picture 2" descr="1e65b116cc1a9f36.png"/>
+          <p:cNvPicPr>
+            <a:picLocks noChangeAspect="1"/>
+          </p:cNvPicPr>
+          <p:nvPr/>
+        </p:nvPicPr>
+        <p:blipFill>
+          <a:blip r:embed="rId2"/>
+          <a:stretch>
+            <a:fillRect/>
+          </a:stretch>
+        </p:blipFill>
+        <p:spPr>
+          <a:xfrm>
+            <a:off x="457200" y="1270392"/>
+            <a:ext cx="8229600" cy="4957296"/>
+          </a:xfrm>
+          <a:prstGeom prst="rect">
+            <a:avLst/>
+          </a:prstGeom>
+        </p:spPr>
+      </p:pic>
     </p:spTree>
   </p:cSld>
   <p:clrMapOvr>
@@ -3683,7 +4194,7 @@
                   <a:srgbClr val="22282E"/>
                 </a:solidFill>
               </a:rPr>
-              <a:t>•  Entender la arquitectura de seguridad de un vehículo moderno y auditar su red interna a través del bus CAN. El alumno aprenderá cómo se comunican las ECUs, cómo interceptar y analizar tramas con can-utils sobre una interfaz SocketCAN, cómo hacer ingeniería inversa de mensajes para identificar funciones, y cuáles son las superficies de ataque remotas (telemática, infoentretenimiento, TPMS), practicando exclusivamente en simuladores o vehículos propios.</a:t>
+              <a:t>•  Entender la arquitectura de seguridad de un vehículo moderno y auditar su red interna a través del bus CAN. El alumno aprenderá cómo se comunican las ECUs, cómo interceptar y analizar tramas con…</a:t>
             </a:r>
           </a:p>
         </p:txBody>
@@ -4092,7 +4603,7 @@
                   <a:srgbClr val="0B3D2E"/>
                 </a:solidFill>
               </a:rPr>
-              <a:t>📖 Definiciones y características</a:t>
+              <a:t>🧠 Explicación en profundidad</a:t>
             </a:r>
           </a:p>
         </p:txBody>
@@ -4130,82 +4641,52 @@
                   <a:srgbClr val="22282E"/>
                 </a:solidFill>
               </a:rPr>
-              <a:t>•  ECU (Electronic Control Unit): microcontrolador que gobierna un subsistema (motor, frenos, puertas). Característica: se comunica por CAN sin autenticar el origen.</a:t>
-            </a:r>
-          </a:p>
-          <a:p>
-            <a:pPr>
-              <a:spcAft>
-                <a:spcPts val="600"/>
-              </a:spcAft>
-            </a:pPr>
-            <a:r>
-              <a:rPr sz="1500">
-                <a:solidFill>
-                  <a:srgbClr val="22282E"/>
-                </a:solidFill>
-              </a:rPr>
-              <a:t>•  Bus CAN: bus serie diferencial de difusión donde toda ECU ve todos los mensajes. Característica: sin cifrado ni autenticación; prioridad por arbitraje de ID.</a:t>
-            </a:r>
-          </a:p>
-          <a:p>
-            <a:pPr>
-              <a:spcAft>
-                <a:spcPts val="600"/>
-              </a:spcAft>
-            </a:pPr>
-            <a:r>
-              <a:rPr sz="1500">
-                <a:solidFill>
-                  <a:srgbClr val="22282E"/>
-                </a:solidFill>
-              </a:rPr>
-              <a:t>•  Trama CAN: mensaje con identificador (arbitration ID), DLC y hasta 8 bytes de datos. Característica: el ID indica prioridad y semántica, no remitente.</a:t>
-            </a:r>
-          </a:p>
-          <a:p>
-            <a:pPr>
-              <a:spcAft>
-                <a:spcPts val="600"/>
-              </a:spcAft>
-            </a:pPr>
-            <a:r>
-              <a:rPr sz="1500">
-                <a:solidFill>
-                  <a:srgbClr val="22282E"/>
-                </a:solidFill>
-              </a:rPr>
-              <a:t>•  OBD-II: puerto de diagnóstico obligatorio que da acceso al/los bus(es). Característica: entrada física estándar para auditoría.</a:t>
-            </a:r>
-          </a:p>
-          <a:p>
-            <a:pPr>
-              <a:spcAft>
-                <a:spcPts val="600"/>
-              </a:spcAft>
-            </a:pPr>
-            <a:r>
-              <a:rPr sz="1500">
-                <a:solidFill>
-                  <a:srgbClr val="22282E"/>
-                </a:solidFill>
-              </a:rPr>
-              <a:t>•  SocketCAN: subsistema de Linux que expone CAN como interfaces de red. Característica: habilita can-utils (candump, cansend).</a:t>
-            </a:r>
-          </a:p>
-          <a:p>
-            <a:pPr>
-              <a:spcAft>
-                <a:spcPts val="600"/>
-              </a:spcAft>
-            </a:pPr>
-            <a:r>
-              <a:rPr sz="1500">
-                <a:solidFill>
-                  <a:srgbClr val="22282E"/>
-                </a:solidFill>
-              </a:rPr>
-              <a:t>•  UDS (ISO 14229): protocolo de servicios de diagnóstico unificado. Característica: incluye rutinas y acceso de seguridad (seed/key) a veces débil.</a:t>
+              <a:t>•  En CAN clásico, los nodos comparten bus y arbitran mediante identificador; los valores más dominantes ganan prioridad. El identificador describe prioridad y significado esperado, no autentica qué ECU…</a:t>
+            </a:r>
+          </a:p>
+          <a:p>
+            <a:pPr>
+              <a:spcAft>
+                <a:spcPts val="600"/>
+              </a:spcAft>
+            </a:pPr>
+            <a:r>
+              <a:rPr sz="1500">
+                <a:solidFill>
+                  <a:srgbClr val="22282E"/>
+                </a:solidFill>
+              </a:rPr>
+              <a:t>•  La seguridad moderna depende de arquitectura: gateway, separación de dominios, arranque y actualización seguros, diagnóstico autenticado, protección de claves, detección y respuesta. Añadir…</a:t>
+            </a:r>
+          </a:p>
+          <a:p>
+            <a:pPr>
+              <a:spcAft>
+                <a:spcPts val="600"/>
+              </a:spcAft>
+            </a:pPr>
+            <a:r>
+              <a:rPr sz="1500">
+                <a:solidFill>
+                  <a:srgbClr val="22282E"/>
+                </a:solidFill>
+              </a:rPr>
+              <a:t>•  Analizar tráfico busca periodicidad, contador, checksum y relación con una acción en simulador. Correlación no identifica semántica definitiva. Inyectar en un vehículo real puede accionar sistemas…</a:t>
+            </a:r>
+          </a:p>
+          <a:p>
+            <a:pPr>
+              <a:spcAft>
+                <a:spcPts val="600"/>
+              </a:spcAft>
+            </a:pPr>
+            <a:r>
+              <a:rPr sz="1500">
+                <a:solidFill>
+                  <a:srgbClr val="22282E"/>
+                </a:solidFill>
+              </a:rPr>
+              <a:t>•  Un byte aumenta al mover el control de velocidad en ICSim. Puede representar velocidad, valor escalado o parte de un contador. El alumno modifica una variable por vez, repite, prueba límites y…</a:t>
             </a:r>
           </a:p>
         </p:txBody>
@@ -4256,7 +4737,7 @@
                   <a:srgbClr val="0B3D2E"/>
                 </a:solidFill>
               </a:rPr>
-              <a:t>🧰 Herramientas y preparación</a:t>
+              <a:t>📔 Glosario operativo</a:t>
             </a:r>
           </a:p>
         </p:txBody>
@@ -4294,97 +4775,82 @@
                   <a:srgbClr val="22282E"/>
                 </a:solidFill>
               </a:rPr>
-              <a:t>•  Simulador ICSim (dashboard virtual) sobre vcan, o interfaz CANtact/CANable/OBD-II a USB en vehículo propio.</a:t>
-            </a:r>
-          </a:p>
-          <a:p>
-            <a:pPr>
-              <a:spcAft>
-                <a:spcPts val="600"/>
-              </a:spcAft>
-            </a:pPr>
-            <a:r>
-              <a:rPr sz="1500">
-                <a:solidFill>
-                  <a:srgbClr val="22282E"/>
-                </a:solidFill>
-              </a:rPr>
-              <a:t>•  can-utils (candump, cansend, cansniffer, cangen), SavvyCAN para análisis gráfico.</a:t>
-            </a:r>
-          </a:p>
-          <a:p>
-            <a:pPr>
-              <a:spcAft>
-                <a:spcPts val="600"/>
-              </a:spcAft>
-            </a:pPr>
-            <a:r>
-              <a:rPr sz="1500">
-                <a:solidFill>
-                  <a:srgbClr val="22282E"/>
-                </a:solidFill>
-              </a:rPr>
-              <a:t>•  sudo modprobe vcan</a:t>
-            </a:r>
-          </a:p>
-          <a:p>
-            <a:pPr>
-              <a:spcAft>
-                <a:spcPts val="600"/>
-              </a:spcAft>
-            </a:pPr>
-            <a:r>
-              <a:rPr sz="1500">
-                <a:solidFill>
-                  <a:srgbClr val="22282E"/>
-                </a:solidFill>
-              </a:rPr>
-              <a:t>•  sudo ip link add dev vcan0 type vcan &amp;&amp; sudo ip link set up vcan0</a:t>
-            </a:r>
-          </a:p>
-          <a:p>
-            <a:pPr>
-              <a:spcAft>
-                <a:spcPts val="600"/>
-              </a:spcAft>
-            </a:pPr>
-            <a:r>
-              <a:rPr sz="1500">
-                <a:solidFill>
-                  <a:srgbClr val="22282E"/>
-                </a:solidFill>
-              </a:rPr>
-              <a:t>•  ./setupvcan.sh                       # de ICSim</a:t>
-            </a:r>
-          </a:p>
-          <a:p>
-            <a:pPr>
-              <a:spcAft>
-                <a:spcPts val="600"/>
-              </a:spcAft>
-            </a:pPr>
-            <a:r>
-              <a:rPr sz="1500">
-                <a:solidFill>
-                  <a:srgbClr val="22282E"/>
-                </a:solidFill>
-              </a:rPr>
-              <a:t>•  ./icsim vcan0 &amp;                       # tablero simulado</a:t>
-            </a:r>
-          </a:p>
-          <a:p>
-            <a:pPr>
-              <a:spcAft>
-                <a:spcPts val="600"/>
-              </a:spcAft>
-            </a:pPr>
-            <a:r>
-              <a:rPr sz="1500">
-                <a:solidFill>
-                  <a:srgbClr val="22282E"/>
-                </a:solidFill>
-              </a:rPr>
-              <a:t>•  ./controls vcan0 &amp;                    # mando para generar tráfico</a:t>
+              <a:t>•  Término — Definición útil</a:t>
+            </a:r>
+          </a:p>
+          <a:p>
+            <a:pPr>
+              <a:spcAft>
+                <a:spcPts val="600"/>
+              </a:spcAft>
+            </a:pPr>
+            <a:r>
+              <a:rPr sz="1500">
+                <a:solidFill>
+                  <a:srgbClr val="22282E"/>
+                </a:solidFill>
+              </a:rPr>
+              <a:t>•  ECU — Unidad electrónica que controla una función vehicular.</a:t>
+            </a:r>
+          </a:p>
+          <a:p>
+            <a:pPr>
+              <a:spcAft>
+                <a:spcPts val="600"/>
+              </a:spcAft>
+            </a:pPr>
+            <a:r>
+              <a:rPr sz="1500">
+                <a:solidFill>
+                  <a:srgbClr val="22282E"/>
+                </a:solidFill>
+              </a:rPr>
+              <a:t>•  Arbitration ID — Identificador usado para prioridad y significado, no identidad segura.</a:t>
+            </a:r>
+          </a:p>
+          <a:p>
+            <a:pPr>
+              <a:spcAft>
+                <a:spcPts val="600"/>
+              </a:spcAft>
+            </a:pPr>
+            <a:r>
+              <a:rPr sz="1500">
+                <a:solidFill>
+                  <a:srgbClr val="22282E"/>
+                </a:solidFill>
+              </a:rPr>
+              <a:t>•  DBC — Descripción de señales y codificación de mensajes CAN.</a:t>
+            </a:r>
+          </a:p>
+          <a:p>
+            <a:pPr>
+              <a:spcAft>
+                <a:spcPts val="600"/>
+              </a:spcAft>
+            </a:pPr>
+            <a:r>
+              <a:rPr sz="1500">
+                <a:solidFill>
+                  <a:srgbClr val="22282E"/>
+                </a:solidFill>
+              </a:rPr>
+              <a:t>•  Gateway — Componente que media tráfico entre dominios de red.</a:t>
+            </a:r>
+          </a:p>
+          <a:p>
+            <a:pPr>
+              <a:spcAft>
+                <a:spcPts val="600"/>
+              </a:spcAft>
+            </a:pPr>
+            <a:r>
+              <a:rPr sz="1500">
+                <a:solidFill>
+                  <a:srgbClr val="22282E"/>
+                </a:solidFill>
+              </a:rPr>
+              <a:t>•  vcan — Interfaz CAN virtual de Linux sin bus físico.</a:t>
             </a:r>
           </a:p>
         </p:txBody>
@@ -4435,7 +4901,7 @@
                   <a:srgbClr val="0B3D2E"/>
                 </a:solidFill>
               </a:rPr>
-              <a:t>🧪 Laboratorio guiado</a:t>
+              <a:t>✅ Criterio de dominio</a:t>
             </a:r>
           </a:p>
         </p:txBody>
@@ -4473,97 +4939,7 @@
                   <a:srgbClr val="22282E"/>
                 </a:solidFill>
               </a:rPr>
-              <a:t>•  Monta ICSim sobre vcan0 para trabajar sin riesgo físico.</a:t>
-            </a:r>
-          </a:p>
-          <a:p>
-            <a:pPr>
-              <a:spcAft>
-                <a:spcPts val="600"/>
-              </a:spcAft>
-            </a:pPr>
-            <a:r>
-              <a:rPr sz="1500">
-                <a:solidFill>
-                  <a:srgbClr val="22282E"/>
-                </a:solidFill>
-              </a:rPr>
-              <a:t>•  Observa el tráfico base: con candump y cansniffer identifica el flujo de IDs mientras el mando genera actividad.</a:t>
-            </a:r>
-          </a:p>
-          <a:p>
-            <a:pPr>
-              <a:spcAft>
-                <a:spcPts val="600"/>
-              </a:spcAft>
-            </a:pPr>
-            <a:r>
-              <a:rPr sz="1500">
-                <a:solidFill>
-                  <a:srgbClr val="22282E"/>
-                </a:solidFill>
-              </a:rPr>
-              <a:t>•  Aísla una función: acciona un control (p. ej. intermitente/velocímetro) y usa cansniffer para ver qué ID/bytes cambian.</a:t>
-            </a:r>
-          </a:p>
-          <a:p>
-            <a:pPr>
-              <a:spcAft>
-                <a:spcPts val="600"/>
-              </a:spcAft>
-            </a:pPr>
-            <a:r>
-              <a:rPr sz="1500">
-                <a:solidFill>
-                  <a:srgbClr val="22282E"/>
-                </a:solidFill>
-              </a:rPr>
-              <a:t>•  Ingeniería inversa: correlaciona la acción con la trama exacta; anota ID, offset de byte y rango de valores.</a:t>
-            </a:r>
-          </a:p>
-          <a:p>
-            <a:pPr>
-              <a:spcAft>
-                <a:spcPts val="600"/>
-              </a:spcAft>
-            </a:pPr>
-            <a:r>
-              <a:rPr sz="1500">
-                <a:solidFill>
-                  <a:srgbClr val="22282E"/>
-                </a:solidFill>
-              </a:rPr>
-              <a:t>•  Reproduce: con cansend reproduce la trama para reproducir la función en el simulador (replay).</a:t>
-            </a:r>
-          </a:p>
-          <a:p>
-            <a:pPr>
-              <a:spcAft>
-                <a:spcPts val="600"/>
-              </a:spcAft>
-            </a:pPr>
-            <a:r>
-              <a:rPr sz="1500">
-                <a:solidFill>
-                  <a:srgbClr val="22282E"/>
-                </a:solidFill>
-              </a:rPr>
-              <a:t>•  Explora diagnóstico: revisa conceptualmente UDS (seed/key) y por qué un acceso de seguridad débil permite rutinas peligrosas.</a:t>
-            </a:r>
-          </a:p>
-          <a:p>
-            <a:pPr>
-              <a:spcAft>
-                <a:spcPts val="600"/>
-              </a:spcAft>
-            </a:pPr>
-            <a:r>
-              <a:rPr sz="1500">
-                <a:solidFill>
-                  <a:srgbClr val="22282E"/>
-                </a:solidFill>
-              </a:rPr>
-              <a:t>•  Superficies remotas: documenta cómo telemática, infoentretenimiento y TPMS amplían la superficie y cómo un gateway seguro segmenta buses.</a:t>
+              <a:t>•  Existe dominio cuando el alumno explica arbitraje y falta de identidad, infiere una señal con experimentos repetibles en vcan, evita generalizar IDs y propone controles de ciclo de vida alineados con…</a:t>
             </a:r>
           </a:p>
         </p:txBody>
@@ -4614,7 +4990,7 @@
                   <a:srgbClr val="0B3D2E"/>
                 </a:solidFill>
               </a:rPr>
-              <a:t>✍️ Ejercicios</a:t>
+              <a:t>📖 Definiciones y características</a:t>
             </a:r>
           </a:p>
         </p:txBody>
@@ -4652,82 +5028,82 @@
                   <a:srgbClr val="22282E"/>
                 </a:solidFill>
               </a:rPr>
-              <a:t>•  Configura vcan0 y arranca ICSim.</a:t>
-            </a:r>
-          </a:p>
-          <a:p>
-            <a:pPr>
-              <a:spcAft>
-                <a:spcPts val="600"/>
-              </a:spcAft>
-            </a:pPr>
-            <a:r>
-              <a:rPr sz="1500">
-                <a:solidFill>
-                  <a:srgbClr val="22282E"/>
-                </a:solidFill>
-              </a:rPr>
-              <a:t>•  Identifica el ID y byte que controla el velocímetro simulado.</a:t>
-            </a:r>
-          </a:p>
-          <a:p>
-            <a:pPr>
-              <a:spcAft>
-                <a:spcPts val="600"/>
-              </a:spcAft>
-            </a:pPr>
-            <a:r>
-              <a:rPr sz="1500">
-                <a:solidFill>
-                  <a:srgbClr val="22282E"/>
-                </a:solidFill>
-              </a:rPr>
-              <a:t>•  Reproduce por replay el encendido de una señal (intermitente).</a:t>
-            </a:r>
-          </a:p>
-          <a:p>
-            <a:pPr>
-              <a:spcAft>
-                <a:spcPts val="600"/>
-              </a:spcAft>
-            </a:pPr>
-            <a:r>
-              <a:rPr sz="1500">
-                <a:solidFill>
-                  <a:srgbClr val="22282E"/>
-                </a:solidFill>
-              </a:rPr>
-              <a:t>•  Explica por qué CAN no puede saber qué ECU envió una trama.</a:t>
-            </a:r>
-          </a:p>
-          <a:p>
-            <a:pPr>
-              <a:spcAft>
-                <a:spcPts val="600"/>
-              </a:spcAft>
-            </a:pPr>
-            <a:r>
-              <a:rPr sz="1500">
-                <a:solidFill>
-                  <a:srgbClr val="22282E"/>
-                </a:solidFill>
-              </a:rPr>
-              <a:t>•  Describe el flujo seed/key de UDS y su debilidad típica.</a:t>
-            </a:r>
-          </a:p>
-          <a:p>
-            <a:pPr>
-              <a:spcAft>
-                <a:spcPts val="600"/>
-              </a:spcAft>
-            </a:pPr>
-            <a:r>
-              <a:rPr sz="1500">
-                <a:solidFill>
-                  <a:srgbClr val="22282E"/>
-                </a:solidFill>
-              </a:rPr>
-              <a:t>•  Enumera tres superficies de ataque remotas de un vehículo y su mitigación.</a:t>
+              <a:t>•  ECU (Electronic Control Unit): microcontrolador que gobierna un subsistema (motor, frenos, puertas). Característica: se comunica por CAN sin autenticar el origen.</a:t>
+            </a:r>
+          </a:p>
+          <a:p>
+            <a:pPr>
+              <a:spcAft>
+                <a:spcPts val="600"/>
+              </a:spcAft>
+            </a:pPr>
+            <a:r>
+              <a:rPr sz="1500">
+                <a:solidFill>
+                  <a:srgbClr val="22282E"/>
+                </a:solidFill>
+              </a:rPr>
+              <a:t>•  Bus CAN: bus serie diferencial de difusión donde toda ECU ve todos los mensajes. Característica: sin cifrado ni autenticación; prioridad por arbitraje de ID.</a:t>
+            </a:r>
+          </a:p>
+          <a:p>
+            <a:pPr>
+              <a:spcAft>
+                <a:spcPts val="600"/>
+              </a:spcAft>
+            </a:pPr>
+            <a:r>
+              <a:rPr sz="1500">
+                <a:solidFill>
+                  <a:srgbClr val="22282E"/>
+                </a:solidFill>
+              </a:rPr>
+              <a:t>•  Trama CAN: mensaje con identificador (arbitration ID), DLC y hasta 8 bytes de datos. Característica: el ID indica prioridad y semántica, no remitente.</a:t>
+            </a:r>
+          </a:p>
+          <a:p>
+            <a:pPr>
+              <a:spcAft>
+                <a:spcPts val="600"/>
+              </a:spcAft>
+            </a:pPr>
+            <a:r>
+              <a:rPr sz="1500">
+                <a:solidFill>
+                  <a:srgbClr val="22282E"/>
+                </a:solidFill>
+              </a:rPr>
+              <a:t>•  OBD-II: puerto de diagnóstico obligatorio que da acceso al/los bus(es). Característica: entrada física estándar para auditoría.</a:t>
+            </a:r>
+          </a:p>
+          <a:p>
+            <a:pPr>
+              <a:spcAft>
+                <a:spcPts val="600"/>
+              </a:spcAft>
+            </a:pPr>
+            <a:r>
+              <a:rPr sz="1500">
+                <a:solidFill>
+                  <a:srgbClr val="22282E"/>
+                </a:solidFill>
+              </a:rPr>
+              <a:t>•  SocketCAN: subsistema de Linux que expone CAN como interfaces de red. Característica: habilita can-utils (candump, cansend).</a:t>
+            </a:r>
+          </a:p>
+          <a:p>
+            <a:pPr>
+              <a:spcAft>
+                <a:spcPts val="600"/>
+              </a:spcAft>
+            </a:pPr>
+            <a:r>
+              <a:rPr sz="1500">
+                <a:solidFill>
+                  <a:srgbClr val="22282E"/>
+                </a:solidFill>
+              </a:rPr>
+              <a:t>•  UDS (ISO 14229): protocolo de servicios de diagnóstico unificado. Característica: incluye rutinas y acceso de seguridad (seed/key) a veces débil.</a:t>
             </a:r>
           </a:p>
         </p:txBody>
@@ -4778,7 +5154,7 @@
                   <a:srgbClr val="0B3D2E"/>
                 </a:solidFill>
               </a:rPr>
-              <a:t>📝 Reto verificable</a:t>
+              <a:t>🧰 Herramientas y preparación</a:t>
             </a:r>
           </a:p>
         </p:txBody>
@@ -4816,7 +5192,22 @@
                   <a:srgbClr val="22282E"/>
                 </a:solidFill>
               </a:rPr>
-              <a:t>•  En el simulador ICSim, haz ingeniería inversa de una función (velocímetro, intermitentes o cerraduras) y reprodúcela mediante inyección de la trama correcta. Criterio de aceptación: identificas el arbitration ID y el/los byte(s) responsables, y demuestras con cansend que reproduces la función en el tablero simulado, documentando la trama exacta.</a:t>
+              <a:t>•  Simulador ICSim (dashboard virtual) sobre vcan, o interfaz CANtact/CANable/OBD-II a USB en vehículo propio.</a:t>
+            </a:r>
+          </a:p>
+          <a:p>
+            <a:pPr>
+              <a:spcAft>
+                <a:spcPts val="600"/>
+              </a:spcAft>
+            </a:pPr>
+            <a:r>
+              <a:rPr sz="1500">
+                <a:solidFill>
+                  <a:srgbClr val="22282E"/>
+                </a:solidFill>
+              </a:rPr>
+              <a:t>•  can-utils (candump, cansend, cansniffer, cangen), SavvyCAN para análisis gráfico.</a:t>
             </a:r>
           </a:p>
         </p:txBody>
